--- a/docs/Executive_Pitch.pptx
+++ b/docs/Executive_Pitch.pptx
@@ -3089,7 +3089,7 @@
                 <a:ea typeface="Calibri" pitchFamily="34" charset="-122"/>
                 <a:cs typeface="Calibri" pitchFamily="34" charset="-120"/>
               </a:rPr>
-              <a:t>SGD 13,200</a:t>
+              <a:t>not started</a:t>
             </a:r>
             <a:endParaRPr lang="en-US" sz="1200" dirty="0"/>
           </a:p>
@@ -3304,7 +3304,7 @@
                 <a:ea typeface="Calibri" pitchFamily="34" charset="-122"/>
                 <a:cs typeface="Calibri" pitchFamily="34" charset="-120"/>
               </a:rPr>
-              <a:t>SGD 26,000</a:t>
+              <a:t>not started</a:t>
             </a:r>
             <a:endParaRPr lang="en-US" sz="1200" dirty="0"/>
           </a:p>
@@ -3519,7 +3519,7 @@
                 <a:ea typeface="Calibri" pitchFamily="34" charset="-122"/>
                 <a:cs typeface="Calibri" pitchFamily="34" charset="-120"/>
               </a:rPr>
-              <a:t>SGD 65,400</a:t>
+              <a:t>not started</a:t>
             </a:r>
             <a:endParaRPr lang="en-US" sz="1200" dirty="0"/>
           </a:p>
@@ -3734,7 +3734,7 @@
                 <a:ea typeface="Calibri" pitchFamily="34" charset="-122"/>
                 <a:cs typeface="Calibri" pitchFamily="34" charset="-120"/>
               </a:rPr>
-              <a:t>SGD 25,000</a:t>
+              <a:t>not started</a:t>
             </a:r>
             <a:endParaRPr lang="en-US" sz="1200" dirty="0"/>
           </a:p>
@@ -6454,7 +6454,7 @@
                 <a:ea typeface="Calibri" pitchFamily="34" charset="-122"/>
                 <a:cs typeface="Calibri" pitchFamily="34" charset="-120"/>
               </a:rPr>
-              <a:t>Mechanism identified at 98.8% accuracy</a:t>
+              <a:t>Mechanism named from which sensor limits tripped</a:t>
             </a:r>
             <a:endParaRPr lang="en-US" sz="1250" dirty="0"/>
           </a:p>
